--- a/Python Outputs.pptx
+++ b/Python Outputs.pptx
@@ -24,6 +24,7 @@
     <p:sldId id="272" r:id="rId18"/>
     <p:sldId id="273" r:id="rId19"/>
     <p:sldId id="274" r:id="rId20"/>
+    <p:sldId id="275" r:id="rId21"/>
   </p:sldIdLst>
   <p:sldSz cx="12192000" cy="6858000"/>
   <p:notesSz cx="6858000" cy="9144000"/>
@@ -133,7 +134,7 @@
 <file path=ppt/revisionInfo.xml><?xml version="1.0" encoding="utf-8"?>
 <p1510:revInfo xmlns:a="http://schemas.openxmlformats.org/drawingml/2006/main" xmlns:r="http://schemas.openxmlformats.org/officeDocument/2006/relationships" xmlns:p1510="http://schemas.microsoft.com/office/powerpoint/2015/10/main">
   <p1510:revLst>
-    <p1510:client id="{E13490B2-1E45-4610-9623-8DEE7D02CE53}" v="12" dt="2025-07-15T16:19:47.938"/>
+    <p1510:client id="{E13490B2-1E45-4610-9623-8DEE7D02CE53}" v="15" dt="2025-07-23T03:35:16.311"/>
   </p1510:revLst>
 </p1510:revInfo>
 </file>
@@ -143,7 +144,7 @@
   <pc:docChgLst>
     <pc:chgData name="Hrushikesh Gudugunti" userId="57b5ca6df9311485" providerId="LiveId" clId="{E13490B2-1E45-4610-9623-8DEE7D02CE53}"/>
     <pc:docChg chg="undo custSel addSld modSld">
-      <pc:chgData name="Hrushikesh Gudugunti" userId="57b5ca6df9311485" providerId="LiveId" clId="{E13490B2-1E45-4610-9623-8DEE7D02CE53}" dt="2025-07-15T16:21:10.308" v="80" actId="1076"/>
+      <pc:chgData name="Hrushikesh Gudugunti" userId="57b5ca6df9311485" providerId="LiveId" clId="{E13490B2-1E45-4610-9623-8DEE7D02CE53}" dt="2025-07-23T03:35:29.513" v="104" actId="1076"/>
       <pc:docMkLst>
         <pc:docMk/>
       </pc:docMkLst>
@@ -230,22 +231,6 @@
             <ac:spMk id="2" creationId="{2CC38F37-5ACF-74A4-A482-CB6945D11385}"/>
           </ac:spMkLst>
         </pc:spChg>
-        <pc:picChg chg="add del mod">
-          <ac:chgData name="Hrushikesh Gudugunti" userId="57b5ca6df9311485" providerId="LiveId" clId="{E13490B2-1E45-4610-9623-8DEE7D02CE53}" dt="2025-07-14T18:05:46.901" v="39" actId="478"/>
-          <ac:picMkLst>
-            <pc:docMk/>
-            <pc:sldMk cId="3307965103" sldId="273"/>
-            <ac:picMk id="3" creationId="{F3BC57CE-5EAD-9C9D-CABA-1C7277EAF111}"/>
-          </ac:picMkLst>
-        </pc:picChg>
-        <pc:picChg chg="add del mod">
-          <ac:chgData name="Hrushikesh Gudugunti" userId="57b5ca6df9311485" providerId="LiveId" clId="{E13490B2-1E45-4610-9623-8DEE7D02CE53}" dt="2025-07-14T18:06:01.680" v="45" actId="478"/>
-          <ac:picMkLst>
-            <pc:docMk/>
-            <pc:sldMk cId="3307965103" sldId="273"/>
-            <ac:picMk id="5" creationId="{DA36998E-7F38-7AD3-6238-482D6EBCA1A1}"/>
-          </ac:picMkLst>
-        </pc:picChg>
         <pc:picChg chg="add mod">
           <ac:chgData name="Hrushikesh Gudugunti" userId="57b5ca6df9311485" providerId="LiveId" clId="{E13490B2-1E45-4610-9623-8DEE7D02CE53}" dt="2025-07-14T18:06:45.678" v="50" actId="1076"/>
           <ac:picMkLst>
@@ -269,20 +254,59 @@
             <ac:spMk id="5" creationId="{AA59E77D-F697-2C9D-3EB9-0F4A210F4C29}"/>
           </ac:spMkLst>
         </pc:spChg>
-        <pc:spChg chg="add del">
-          <ac:chgData name="Hrushikesh Gudugunti" userId="57b5ca6df9311485" providerId="LiveId" clId="{E13490B2-1E45-4610-9623-8DEE7D02CE53}" dt="2025-07-15T16:20:25.620" v="72" actId="478"/>
-          <ac:spMkLst>
-            <pc:docMk/>
-            <pc:sldMk cId="2852300880" sldId="274"/>
-            <ac:spMk id="7" creationId="{6745D688-F20F-8E31-AB57-0747CEE9E35E}"/>
-          </ac:spMkLst>
-        </pc:spChg>
         <pc:picChg chg="add mod">
           <ac:chgData name="Hrushikesh Gudugunti" userId="57b5ca6df9311485" providerId="LiveId" clId="{E13490B2-1E45-4610-9623-8DEE7D02CE53}" dt="2025-07-15T16:20:57.589" v="79" actId="1076"/>
           <ac:picMkLst>
             <pc:docMk/>
             <pc:sldMk cId="2852300880" sldId="274"/>
             <ac:picMk id="3" creationId="{A06DAEA0-6869-0AFC-DD4C-D85533FA9757}"/>
+          </ac:picMkLst>
+        </pc:picChg>
+      </pc:sldChg>
+      <pc:sldChg chg="addSp delSp modSp new mod">
+        <pc:chgData name="Hrushikesh Gudugunti" userId="57b5ca6df9311485" providerId="LiveId" clId="{E13490B2-1E45-4610-9623-8DEE7D02CE53}" dt="2025-07-23T03:35:29.513" v="104" actId="1076"/>
+        <pc:sldMkLst>
+          <pc:docMk/>
+          <pc:sldMk cId="2417949145" sldId="275"/>
+        </pc:sldMkLst>
+        <pc:spChg chg="add mod">
+          <ac:chgData name="Hrushikesh Gudugunti" userId="57b5ca6df9311485" providerId="LiveId" clId="{E13490B2-1E45-4610-9623-8DEE7D02CE53}" dt="2025-07-23T03:35:24.783" v="103" actId="1076"/>
+          <ac:spMkLst>
+            <pc:docMk/>
+            <pc:sldMk cId="2417949145" sldId="275"/>
+            <ac:spMk id="3" creationId="{49C8FAD8-20A9-90FD-83AC-927FC51EF7CB}"/>
+          </ac:spMkLst>
+        </pc:spChg>
+        <pc:spChg chg="add del mod">
+          <ac:chgData name="Hrushikesh Gudugunti" userId="57b5ca6df9311485" providerId="LiveId" clId="{E13490B2-1E45-4610-9623-8DEE7D02CE53}" dt="2025-07-23T03:35:09.438" v="98" actId="478"/>
+          <ac:spMkLst>
+            <pc:docMk/>
+            <pc:sldMk cId="2417949145" sldId="275"/>
+            <ac:spMk id="5" creationId="{1AA4C232-08AC-5C8F-9B65-2B2C83559BF0}"/>
+          </ac:spMkLst>
+        </pc:spChg>
+        <pc:picChg chg="add del mod">
+          <ac:chgData name="Hrushikesh Gudugunti" userId="57b5ca6df9311485" providerId="LiveId" clId="{E13490B2-1E45-4610-9623-8DEE7D02CE53}" dt="2025-07-23T03:34:32.023" v="96" actId="478"/>
+          <ac:picMkLst>
+            <pc:docMk/>
+            <pc:sldMk cId="2417949145" sldId="275"/>
+            <ac:picMk id="2" creationId="{0139A41B-C4B4-B94A-6079-7BF6927733A3}"/>
+          </ac:picMkLst>
+        </pc:picChg>
+        <pc:picChg chg="add del mod">
+          <ac:chgData name="Hrushikesh Gudugunti" userId="57b5ca6df9311485" providerId="LiveId" clId="{E13490B2-1E45-4610-9623-8DEE7D02CE53}" dt="2025-07-23T03:35:09.438" v="98" actId="478"/>
+          <ac:picMkLst>
+            <pc:docMk/>
+            <pc:sldMk cId="2417949145" sldId="275"/>
+            <ac:picMk id="4" creationId="{99C1AF32-D087-40A3-D36B-77FF298BB8AB}"/>
+          </ac:picMkLst>
+        </pc:picChg>
+        <pc:picChg chg="add mod">
+          <ac:chgData name="Hrushikesh Gudugunti" userId="57b5ca6df9311485" providerId="LiveId" clId="{E13490B2-1E45-4610-9623-8DEE7D02CE53}" dt="2025-07-23T03:35:29.513" v="104" actId="1076"/>
+          <ac:picMkLst>
+            <pc:docMk/>
+            <pc:sldMk cId="2417949145" sldId="275"/>
+            <ac:picMk id="7" creationId="{86227B7E-6C65-06C0-76DA-07AFBC01F973}"/>
           </ac:picMkLst>
         </pc:picChg>
       </pc:sldChg>
@@ -440,7 +464,7 @@
           <a:p>
             <a:fld id="{8FCC635E-80FD-4E6C-927E-D5DBF6CE9F47}" type="datetimeFigureOut">
               <a:rPr lang="en-IN" smtClean="0"/>
-              <a:t>15-07-2025</a:t>
+              <a:t>23-07-2025</a:t>
             </a:fld>
             <a:endParaRPr lang="en-IN"/>
           </a:p>
@@ -640,7 +664,7 @@
           <a:p>
             <a:fld id="{8FCC635E-80FD-4E6C-927E-D5DBF6CE9F47}" type="datetimeFigureOut">
               <a:rPr lang="en-IN" smtClean="0"/>
-              <a:t>15-07-2025</a:t>
+              <a:t>23-07-2025</a:t>
             </a:fld>
             <a:endParaRPr lang="en-IN"/>
           </a:p>
@@ -850,7 +874,7 @@
           <a:p>
             <a:fld id="{8FCC635E-80FD-4E6C-927E-D5DBF6CE9F47}" type="datetimeFigureOut">
               <a:rPr lang="en-IN" smtClean="0"/>
-              <a:t>15-07-2025</a:t>
+              <a:t>23-07-2025</a:t>
             </a:fld>
             <a:endParaRPr lang="en-IN"/>
           </a:p>
@@ -1050,7 +1074,7 @@
           <a:p>
             <a:fld id="{8FCC635E-80FD-4E6C-927E-D5DBF6CE9F47}" type="datetimeFigureOut">
               <a:rPr lang="en-IN" smtClean="0"/>
-              <a:t>15-07-2025</a:t>
+              <a:t>23-07-2025</a:t>
             </a:fld>
             <a:endParaRPr lang="en-IN"/>
           </a:p>
@@ -1326,7 +1350,7 @@
           <a:p>
             <a:fld id="{8FCC635E-80FD-4E6C-927E-D5DBF6CE9F47}" type="datetimeFigureOut">
               <a:rPr lang="en-IN" smtClean="0"/>
-              <a:t>15-07-2025</a:t>
+              <a:t>23-07-2025</a:t>
             </a:fld>
             <a:endParaRPr lang="en-IN"/>
           </a:p>
@@ -1594,7 +1618,7 @@
           <a:p>
             <a:fld id="{8FCC635E-80FD-4E6C-927E-D5DBF6CE9F47}" type="datetimeFigureOut">
               <a:rPr lang="en-IN" smtClean="0"/>
-              <a:t>15-07-2025</a:t>
+              <a:t>23-07-2025</a:t>
             </a:fld>
             <a:endParaRPr lang="en-IN"/>
           </a:p>
@@ -2009,7 +2033,7 @@
           <a:p>
             <a:fld id="{8FCC635E-80FD-4E6C-927E-D5DBF6CE9F47}" type="datetimeFigureOut">
               <a:rPr lang="en-IN" smtClean="0"/>
-              <a:t>15-07-2025</a:t>
+              <a:t>23-07-2025</a:t>
             </a:fld>
             <a:endParaRPr lang="en-IN"/>
           </a:p>
@@ -2151,7 +2175,7 @@
           <a:p>
             <a:fld id="{8FCC635E-80FD-4E6C-927E-D5DBF6CE9F47}" type="datetimeFigureOut">
               <a:rPr lang="en-IN" smtClean="0"/>
-              <a:t>15-07-2025</a:t>
+              <a:t>23-07-2025</a:t>
             </a:fld>
             <a:endParaRPr lang="en-IN"/>
           </a:p>
@@ -2264,7 +2288,7 @@
           <a:p>
             <a:fld id="{8FCC635E-80FD-4E6C-927E-D5DBF6CE9F47}" type="datetimeFigureOut">
               <a:rPr lang="en-IN" smtClean="0"/>
-              <a:t>15-07-2025</a:t>
+              <a:t>23-07-2025</a:t>
             </a:fld>
             <a:endParaRPr lang="en-IN"/>
           </a:p>
@@ -2577,7 +2601,7 @@
           <a:p>
             <a:fld id="{8FCC635E-80FD-4E6C-927E-D5DBF6CE9F47}" type="datetimeFigureOut">
               <a:rPr lang="en-IN" smtClean="0"/>
-              <a:t>15-07-2025</a:t>
+              <a:t>23-07-2025</a:t>
             </a:fld>
             <a:endParaRPr lang="en-IN"/>
           </a:p>
@@ -2866,7 +2890,7 @@
           <a:p>
             <a:fld id="{8FCC635E-80FD-4E6C-927E-D5DBF6CE9F47}" type="datetimeFigureOut">
               <a:rPr lang="en-IN" smtClean="0"/>
-              <a:t>15-07-2025</a:t>
+              <a:t>23-07-2025</a:t>
             </a:fld>
             <a:endParaRPr lang="en-IN"/>
           </a:p>
@@ -3109,7 +3133,7 @@
           <a:p>
             <a:fld id="{8FCC635E-80FD-4E6C-927E-D5DBF6CE9F47}" type="datetimeFigureOut">
               <a:rPr lang="en-IN" smtClean="0"/>
-              <a:t>15-07-2025</a:t>
+              <a:t>23-07-2025</a:t>
             </a:fld>
             <a:endParaRPr lang="en-IN"/>
           </a:p>
@@ -4667,6 +4691,107 @@
     <p:extLst>
       <p:ext uri="{BB962C8B-B14F-4D97-AF65-F5344CB8AC3E}">
         <p14:creationId xmlns:p14="http://schemas.microsoft.com/office/powerpoint/2010/main" val="1591852553"/>
+      </p:ext>
+    </p:extLst>
+  </p:cSld>
+  <p:clrMapOvr>
+    <a:masterClrMapping/>
+  </p:clrMapOvr>
+</p:sld>
+</file>
+
+<file path=ppt/slides/slide20.xml><?xml version="1.0" encoding="utf-8"?>
+<p:sld xmlns:a="http://schemas.openxmlformats.org/drawingml/2006/main" xmlns:r="http://schemas.openxmlformats.org/officeDocument/2006/relationships" xmlns:p="http://schemas.openxmlformats.org/presentationml/2006/main">
+  <p:cSld>
+    <p:spTree>
+      <p:nvGrpSpPr>
+        <p:cNvPr id="1" name=""/>
+        <p:cNvGrpSpPr/>
+        <p:nvPr/>
+      </p:nvGrpSpPr>
+      <p:grpSpPr>
+        <a:xfrm>
+          <a:off x="0" y="0"/>
+          <a:ext cx="0" cy="0"/>
+          <a:chOff x="0" y="0"/>
+          <a:chExt cx="0" cy="0"/>
+        </a:xfrm>
+      </p:grpSpPr>
+      <p:sp>
+        <p:nvSpPr>
+          <p:cNvPr id="3" name="TextBox 2">
+            <a:extLst>
+              <a:ext uri="{FF2B5EF4-FFF2-40B4-BE49-F238E27FC236}">
+                <a16:creationId xmlns:a16="http://schemas.microsoft.com/office/drawing/2014/main" id="{49C8FAD8-20A9-90FD-83AC-927FC51EF7CB}"/>
+              </a:ext>
+            </a:extLst>
+          </p:cNvPr>
+          <p:cNvSpPr txBox="1"/>
+          <p:nvPr/>
+        </p:nvSpPr>
+        <p:spPr>
+          <a:xfrm>
+            <a:off x="3598605" y="393015"/>
+            <a:ext cx="6096000" cy="707886"/>
+          </a:xfrm>
+          <a:prstGeom prst="rect">
+            <a:avLst/>
+          </a:prstGeom>
+          <a:noFill/>
+        </p:spPr>
+        <p:txBody>
+          <a:bodyPr wrap="square">
+            <a:spAutoFit/>
+          </a:bodyPr>
+          <a:lstStyle/>
+          <a:p>
+            <a:r>
+              <a:rPr lang="en-IN" sz="4000" dirty="0"/>
+              <a:t>Main21.py Output</a:t>
+            </a:r>
+          </a:p>
+        </p:txBody>
+      </p:sp>
+      <p:pic>
+        <p:nvPicPr>
+          <p:cNvPr id="7" name="Picture 6" descr="A person standing in front of a body of water&#10;&#10;AI-generated content may be incorrect.">
+            <a:extLst>
+              <a:ext uri="{FF2B5EF4-FFF2-40B4-BE49-F238E27FC236}">
+                <a16:creationId xmlns:a16="http://schemas.microsoft.com/office/drawing/2014/main" id="{86227B7E-6C65-06C0-76DA-07AFBC01F973}"/>
+              </a:ext>
+            </a:extLst>
+          </p:cNvPr>
+          <p:cNvPicPr>
+            <a:picLocks noChangeAspect="1"/>
+          </p:cNvPicPr>
+          <p:nvPr/>
+        </p:nvPicPr>
+        <p:blipFill>
+          <a:blip r:embed="rId2">
+            <a:extLst>
+              <a:ext uri="{28A0092B-C50C-407E-A947-70E740481C1C}">
+                <a14:useLocalDpi xmlns:a14="http://schemas.microsoft.com/office/drawing/2010/main" val="0"/>
+              </a:ext>
+            </a:extLst>
+          </a:blip>
+          <a:stretch>
+            <a:fillRect/>
+          </a:stretch>
+        </p:blipFill>
+        <p:spPr>
+          <a:xfrm>
+            <a:off x="0" y="1212030"/>
+            <a:ext cx="12192000" cy="5397500"/>
+          </a:xfrm>
+          <a:prstGeom prst="rect">
+            <a:avLst/>
+          </a:prstGeom>
+        </p:spPr>
+      </p:pic>
+    </p:spTree>
+    <p:extLst>
+      <p:ext uri="{BB962C8B-B14F-4D97-AF65-F5344CB8AC3E}">
+        <p14:creationId xmlns:p14="http://schemas.microsoft.com/office/powerpoint/2010/main" val="2417949145"/>
       </p:ext>
     </p:extLst>
   </p:cSld>
